--- a/Topic_B/Exam_Practice/TB-L06_Writing_Workshop_Colours_and_Accurate_Description.pptx
+++ b/Topic_B/Exam_Practice/TB-L06_Writing_Workshop_Colours_and_Accurate_Description.pptx
@@ -784,7 +784,11 @@
           <a:lstStyle/>
           <a:p>
             <a:r>
-              <a:rPr lang="en-US" dirty="0"/>
+              <a:rPr lang="ar-SA" dirty="0">
+                <a:latin typeface="Amiri" pitchFamily="2" charset="-78"/>
+                <a:ea typeface="Amiri" pitchFamily="2" charset="-78"/>
+                <a:cs typeface="Amiri" pitchFamily="2" charset="-78"/>
+              </a:rPr>
               <a:t>Q3 (3 min to choose and read). Title (أ) suits Core and Develop; title (ب) suits Stretch.</a:t>
             </a:r>
             <a:endParaRPr lang="en-US" dirty="0"/>
@@ -1403,7 +1407,11 @@
           <a:lstStyle/>
           <a:p>
             <a:r>
-              <a:rPr lang="en-US" dirty="0"/>
+              <a:rPr lang="ar-SA" dirty="0">
+                <a:latin typeface="Amiri" pitchFamily="2" charset="-78"/>
+                <a:ea typeface="Amiri" pitchFamily="2" charset="-78"/>
+                <a:cs typeface="Amiri" pitchFamily="2" charset="-78"/>
+              </a:rPr>
               <a:t>WELCOME (1 min) — while students join.
 • Greet each student by name as they arrive: السَّلَامُ عَلَيْكُمْ. Take the register (Pastoral Tracker: attendance 0/1).
 • 2-MINUTE CHECK-IN (SEND training): a private chat to any student who seemed unsettled last lesson — “Are you okay today? 👍 / 👎”.
@@ -1936,7 +1944,11 @@
           <a:lstStyle/>
           <a:p>
             <a:r>
-              <a:rPr lang="en-US" dirty="0"/>
+              <a:rPr lang="ar-SA" dirty="0">
+                <a:latin typeface="Amiri" pitchFamily="2" charset="-78"/>
+                <a:ea typeface="Amiri" pitchFamily="2" charset="-78"/>
+                <a:cs typeface="Amiri" pitchFamily="2" charset="-78"/>
+              </a:rPr>
               <a:t>Question words: كَيْفَ (how) · صِفِي (describe — to a girl) · مَا (what) · لِمَاذَا (why) · مَتَى (when) — bullet 2 asks for COLOUR and MATERIAL.</a:t>
             </a:r>
             <a:endParaRPr lang="en-US" dirty="0"/>
@@ -2508,6 +2520,7 @@
                   <a:srgbClr val="D4AF37"/>
                 </a:solidFill>
                 <a:latin typeface="Amiri" pitchFamily="2" charset="-78"/>
+                <a:ea typeface="Amiri" pitchFamily="2" charset="-78"/>
                 <a:cs typeface="Amiri" pitchFamily="2" charset="-78"/>
               </a:rPr>
               <a:t>م</a:t>
@@ -2714,6 +2727,7 @@
                   <a:srgbClr val="D4AF37"/>
                 </a:solidFill>
                 <a:latin typeface="Amiri" pitchFamily="2" charset="-78"/>
+                <a:ea typeface="Amiri" pitchFamily="2" charset="-78"/>
                 <a:cs typeface="Amiri" pitchFamily="2" charset="-78"/>
               </a:rPr>
               <a:t>وَرْشَةُ الكِتَابَةِ — الأَلْوَانُ وَالوَصْفُ</a:t>
@@ -3171,6 +3185,7 @@
                   <a:srgbClr val="D4AF37"/>
                 </a:solidFill>
                 <a:latin typeface="Amiri" pitchFamily="2" charset="-78"/>
+                <a:ea typeface="Amiri" pitchFamily="2" charset="-78"/>
                 <a:cs typeface="Amiri" pitchFamily="2" charset="-78"/>
               </a:rPr>
               <a:t>م</a:t>
@@ -3491,6 +3506,7 @@
                   <a:srgbClr val="8A6D1E"/>
                 </a:solidFill>
                 <a:latin typeface="Amiri" pitchFamily="2" charset="-78"/>
+                <a:ea typeface="Amiri" pitchFamily="2" charset="-78"/>
                 <a:cs typeface="Amiri" pitchFamily="2" charset="-78"/>
               </a:rPr>
               <a:t>نَمُوذَجُ الإِجَابَةِ</a:t>
@@ -3604,6 +3620,7 @@
                   <a:srgbClr val="1F2A37"/>
                 </a:solidFill>
                 <a:latin typeface="Amiri" pitchFamily="2" charset="-78"/>
+                <a:ea typeface="Amiri" pitchFamily="2" charset="-78"/>
                 <a:cs typeface="Amiri" pitchFamily="2" charset="-78"/>
               </a:rPr>
               <a:t>مَرْحَبًا يَا جُودُ،</a:t>
@@ -3623,6 +3640,7 @@
                   <a:srgbClr val="1F2A37"/>
                 </a:solidFill>
                 <a:latin typeface="Amiri" pitchFamily="2" charset="-78"/>
+                <a:ea typeface="Amiri" pitchFamily="2" charset="-78"/>
                 <a:cs typeface="Amiri" pitchFamily="2" charset="-78"/>
               </a:rPr>
               <a:t>كَيْفَ حَالُكِ؟ أَمْسِ كَانَ عِيدُ مِيلَادِي، وَأَخَذْتُ هَدَايَا جَمِيلَةً. أَعْطَتْنِي أُمِّي فُسْتَانًا أَزْرَقَ فَاتِحًا، وَهُوَ مَصْنُوعٌ مِنَ الحَرِيرِ. أَعْطَانِي أَبِي حَقِيبَةً سَوْدَاءَ صَغِيرَةً. أَمَّا أُخْتِي فَأَعْطَتْنِي أَسَاوِرَ مُلَوَّنَةً: حَمْرَاءَ وَخَضْرَاءَ وَصَفْرَاءَ. أُحِبُّ الفُسْتَانَ كَثِيرًا، لِأَنَّ لَوْنَهُ هَادِئٌ وَجَمِيلٌ. فِي المَسَاءِ أَكَلْنَا كَعْكَةً بَيْضَاءَ وَوَرْدِيَّةً. فِي نِهَايَةِ الأُسْبُوعِ سَأَلْبَسُ الفُسْتَانَ فِي حَفْلَةِ خَالَتِي.</a:t>
@@ -3642,6 +3660,7 @@
                   <a:srgbClr val="1F2A37"/>
                 </a:solidFill>
                 <a:latin typeface="Amiri" pitchFamily="2" charset="-78"/>
+                <a:ea typeface="Amiri" pitchFamily="2" charset="-78"/>
                 <a:cs typeface="Amiri" pitchFamily="2" charset="-78"/>
               </a:rPr>
               <a:t>مَعَ السَّلَامَةِ،</a:t>
@@ -3661,6 +3680,7 @@
                   <a:srgbClr val="1F2A37"/>
                 </a:solidFill>
                 <a:latin typeface="Amiri" pitchFamily="2" charset="-78"/>
+                <a:ea typeface="Amiri" pitchFamily="2" charset="-78"/>
                 <a:cs typeface="Amiri" pitchFamily="2" charset="-78"/>
               </a:rPr>
               <a:t>مَرْيَمُ</a:t>
@@ -3824,11 +3844,12 @@
               <a:buNone/>
             </a:pPr>
             <a:r>
-              <a:rPr lang="en-US" sz="950" b="1" dirty="0">
+              <a:rPr lang="ar-SA" sz="950" b="1" dirty="0">
                 <a:solidFill>
                   <a:srgbClr val="FFFFFF"/>
                 </a:solidFill>
                 <a:latin typeface="Calibri" pitchFamily="34" charset="0"/>
+                <a:ea typeface="Amiri" pitchFamily="2" charset="-78"/>
                 <a:cs typeface="Amiri" pitchFamily="2" charset="-78"/>
               </a:rPr>
               <a:t>فُسْتَانًا أَزْرَقَ فَاتِحًا</a:t>
@@ -3889,11 +3910,12 @@
               <a:buNone/>
             </a:pPr>
             <a:r>
-              <a:rPr lang="en-US" sz="950" b="1" dirty="0">
+              <a:rPr lang="ar-SA" sz="950" b="1" dirty="0">
                 <a:solidFill>
                   <a:srgbClr val="FFFFFF"/>
                 </a:solidFill>
                 <a:latin typeface="Calibri" pitchFamily="34" charset="0"/>
+                <a:ea typeface="Amiri" pitchFamily="2" charset="-78"/>
                 <a:cs typeface="Amiri" pitchFamily="2" charset="-78"/>
               </a:rPr>
               <a:t>حَقِيبَةً سَوْدَاءَ</a:t>
@@ -3954,11 +3976,12 @@
               <a:buNone/>
             </a:pPr>
             <a:r>
-              <a:rPr lang="en-US" sz="950" b="1" dirty="0">
+              <a:rPr lang="ar-SA" sz="950" b="1" dirty="0">
                 <a:solidFill>
                   <a:srgbClr val="FFFFFF"/>
                 </a:solidFill>
                 <a:latin typeface="Calibri" pitchFamily="34" charset="0"/>
+                <a:ea typeface="Amiri" pitchFamily="2" charset="-78"/>
                 <a:cs typeface="Amiri" pitchFamily="2" charset="-78"/>
               </a:rPr>
               <a:t>أَسَاوِرَ … حَمْرَاءَ</a:t>
@@ -4019,11 +4042,12 @@
               <a:buNone/>
             </a:pPr>
             <a:r>
-              <a:rPr lang="en-US" sz="950" b="1" dirty="0">
+              <a:rPr lang="ar-SA" sz="950" b="1" dirty="0">
                 <a:solidFill>
                   <a:srgbClr val="FFFFFF"/>
                 </a:solidFill>
                 <a:latin typeface="Calibri" pitchFamily="34" charset="0"/>
+                <a:ea typeface="Amiri" pitchFamily="2" charset="-78"/>
                 <a:cs typeface="Amiri" pitchFamily="2" charset="-78"/>
               </a:rPr>
               <a:t>سَأَلْبَسُ</a:t>
@@ -4157,6 +4181,7 @@
                   <a:srgbClr val="D4AF37"/>
                 </a:solidFill>
                 <a:latin typeface="Amiri" pitchFamily="2" charset="-78"/>
+                <a:ea typeface="Amiri" pitchFamily="2" charset="-78"/>
                 <a:cs typeface="Amiri" pitchFamily="2" charset="-78"/>
               </a:rPr>
               <a:t>م</a:t>
@@ -4477,6 +4502,7 @@
                   <a:srgbClr val="8A6D1E"/>
                 </a:solidFill>
                 <a:latin typeface="Amiri" pitchFamily="2" charset="-78"/>
+                <a:ea typeface="Amiri" pitchFamily="2" charset="-78"/>
                 <a:cs typeface="Amiri" pitchFamily="2" charset="-78"/>
               </a:rPr>
               <a:t>نَمُوذَجُ الإِجَابَةِ</a:t>
@@ -4590,6 +4616,7 @@
                   <a:srgbClr val="1F2A37"/>
                 </a:solidFill>
                 <a:latin typeface="Amiri" pitchFamily="2" charset="-78"/>
+                <a:ea typeface="Amiri" pitchFamily="2" charset="-78"/>
                 <a:cs typeface="Amiri" pitchFamily="2" charset="-78"/>
               </a:rPr>
               <a:t>عَزِيزَتِي جُودُ،</a:t>
@@ -4609,6 +4636,7 @@
                   <a:srgbClr val="1F2A37"/>
                 </a:solidFill>
                 <a:latin typeface="Amiri" pitchFamily="2" charset="-78"/>
+                <a:ea typeface="Amiri" pitchFamily="2" charset="-78"/>
                 <a:cs typeface="Amiri" pitchFamily="2" charset="-78"/>
               </a:rPr>
               <a:t>تَحِيَّةً طَيِّبَةً، وَبَعْدُ، فَقَدِ احْتَفَلْنَا أَمْسِ بِعِيدِ مِيلَادِي الخَامِسَ عَشَرَ، وَكَانَتِ الهَدَايَا أَجْمَلَ مِمَّا تَوَقَّعْتُ. أَعْطَتْنِي أُمِّي فُسْتَانًا أَزْرَقَ فَاتِحًا مَصْنُوعًا مِنَ الحَرِيرِ، عَلَيْهِ زُهُورٌ بَيْضَاءُ صَغِيرَةٌ، أَمَّا أَبِي فَاشْتَرَى لِي حَقِيبَةً جِلْدِيَّةً سَوْدَاءَ تَتَّسِعُ لِكُتُبِي كُلِّهَا. وَصَنَعَتْ لِي أُخْتِي الصَّغِيرَةُ بِيَدِهَا أَسَاوِرَ مُلَوَّنَةً، فَتَأَثَّرْتُ كَثِيرًا. أَمَّا الكَعْكَةُ فَكَانَتْ وَرْدِيَّةً بِطَبَقَةٍ مِنَ الشُّوكُولَاتَةِ الغَامِقَةِ. صَحِيحٌ أَنِّي لَا أَلْبَسُ الأَزْرَقَ عَادَةً، غَيْرَ أَنَّ هٰذَا الفُسْتَانَ غَيَّرَ رَأْيِي. سَأَلْبَسُهُ فِي حَفْلَةِ خَالَتِي يَوْمَ الجُمُعَةِ، وَسَأُرْسِلُ لَكِ صُورَةً!</a:t>
@@ -4628,6 +4656,7 @@
                   <a:srgbClr val="1F2A37"/>
                 </a:solidFill>
                 <a:latin typeface="Amiri" pitchFamily="2" charset="-78"/>
+                <a:ea typeface="Amiri" pitchFamily="2" charset="-78"/>
                 <a:cs typeface="Amiri" pitchFamily="2" charset="-78"/>
               </a:rPr>
               <a:t>مَعَ مَحَبَّتِي،</a:t>
@@ -4647,6 +4676,7 @@
                   <a:srgbClr val="1F2A37"/>
                 </a:solidFill>
                 <a:latin typeface="Amiri" pitchFamily="2" charset="-78"/>
+                <a:ea typeface="Amiri" pitchFamily="2" charset="-78"/>
                 <a:cs typeface="Amiri" pitchFamily="2" charset="-78"/>
               </a:rPr>
               <a:t>مَرْيَمُ</a:t>
@@ -4810,11 +4840,12 @@
               <a:buNone/>
             </a:pPr>
             <a:r>
-              <a:rPr lang="en-US" sz="950" b="1" dirty="0">
+              <a:rPr lang="ar-SA" sz="950" b="1" dirty="0">
                 <a:solidFill>
                   <a:srgbClr val="FFFFFF"/>
                 </a:solidFill>
                 <a:latin typeface="Calibri" pitchFamily="34" charset="0"/>
+                <a:ea typeface="Amiri" pitchFamily="2" charset="-78"/>
                 <a:cs typeface="Amiri" pitchFamily="2" charset="-78"/>
               </a:rPr>
               <a:t>أَجْمَلَ مِمَّا تَوَقَّعْتُ</a:t>
@@ -4875,11 +4906,12 @@
               <a:buNone/>
             </a:pPr>
             <a:r>
-              <a:rPr lang="en-US" sz="950" b="1" dirty="0">
+              <a:rPr lang="ar-SA" sz="950" b="1" dirty="0">
                 <a:solidFill>
                   <a:srgbClr val="FFFFFF"/>
                 </a:solidFill>
                 <a:latin typeface="Calibri" pitchFamily="34" charset="0"/>
+                <a:ea typeface="Amiri" pitchFamily="2" charset="-78"/>
                 <a:cs typeface="Amiri" pitchFamily="2" charset="-78"/>
               </a:rPr>
               <a:t>زُهُورٌ بَيْضَاءُ</a:t>
@@ -4940,11 +4972,12 @@
               <a:buNone/>
             </a:pPr>
             <a:r>
-              <a:rPr lang="en-US" sz="950" b="1" dirty="0">
+              <a:rPr lang="ar-SA" sz="950" b="1" dirty="0">
                 <a:solidFill>
                   <a:srgbClr val="FFFFFF"/>
                 </a:solidFill>
                 <a:latin typeface="Calibri" pitchFamily="34" charset="0"/>
+                <a:ea typeface="Amiri" pitchFamily="2" charset="-78"/>
                 <a:cs typeface="Amiri" pitchFamily="2" charset="-78"/>
               </a:rPr>
               <a:t>حَقِيبَةً جِلْدِيَّةً سَوْدَاءَ</a:t>
@@ -5005,11 +5038,12 @@
               <a:buNone/>
             </a:pPr>
             <a:r>
-              <a:rPr lang="en-US" sz="950" b="1" dirty="0">
+              <a:rPr lang="ar-SA" sz="950" b="1" dirty="0">
                 <a:solidFill>
                   <a:srgbClr val="FFFFFF"/>
                 </a:solidFill>
                 <a:latin typeface="Calibri" pitchFamily="34" charset="0"/>
+                <a:ea typeface="Amiri" pitchFamily="2" charset="-78"/>
                 <a:cs typeface="Amiri" pitchFamily="2" charset="-78"/>
               </a:rPr>
               <a:t>صَحِيحٌ أَنِّي … غَيْرَ أَنَّ</a:t>
@@ -5143,6 +5177,7 @@
                   <a:srgbClr val="D4AF37"/>
                 </a:solidFill>
                 <a:latin typeface="Amiri" pitchFamily="2" charset="-78"/>
+                <a:ea typeface="Amiri" pitchFamily="2" charset="-78"/>
                 <a:cs typeface="Amiri" pitchFamily="2" charset="-78"/>
               </a:rPr>
               <a:t>م</a:t>
@@ -5463,6 +5498,7 @@
                   <a:srgbClr val="8A6D1E"/>
                 </a:solidFill>
                 <a:latin typeface="Amiri" pitchFamily="2" charset="-78"/>
+                <a:ea typeface="Amiri" pitchFamily="2" charset="-78"/>
                 <a:cs typeface="Amiri" pitchFamily="2" charset="-78"/>
               </a:rPr>
               <a:t>اخْتَرْ عُنْوَانًا وَاحِدًا</a:t>
@@ -5743,6 +5779,7 @@
                   <a:srgbClr val="1B3B6F"/>
                 </a:solidFill>
                 <a:latin typeface="Amiri" pitchFamily="2" charset="-78"/>
+                <a:ea typeface="Amiri" pitchFamily="2" charset="-78"/>
                 <a:cs typeface="Amiri" pitchFamily="2" charset="-78"/>
               </a:rPr>
               <a:t>الأَلْوَانُ فِي حَيَاتِي</a:t>
@@ -5781,6 +5818,7 @@
                   <a:srgbClr val="1B3B6F"/>
                 </a:solidFill>
                 <a:latin typeface="Amiri" pitchFamily="2" charset="-78"/>
+                <a:ea typeface="Amiri" pitchFamily="2" charset="-78"/>
                 <a:cs typeface="Amiri" pitchFamily="2" charset="-78"/>
               </a:rPr>
               <a:t>(أ)</a:t>
@@ -5887,6 +5925,7 @@
                   <a:srgbClr val="1B3B6F"/>
                 </a:solidFill>
                 <a:latin typeface="Amiri" pitchFamily="2" charset="-78"/>
+                <a:ea typeface="Amiri" pitchFamily="2" charset="-78"/>
                 <a:cs typeface="Amiri" pitchFamily="2" charset="-78"/>
               </a:rPr>
               <a:t>صِفْ أَلْوَانَ مَدِينَتِكَ أَوْ بَيْتِكَ · لَوْنُكَ المُفَضَّلُ وَلِمَاذَا · ذِكْرَى مُرْتَبِطَةٌ بِلَوْنٍ · رَأْيُكَ وَخُطَطُكَ</a:t>
@@ -6018,6 +6057,7 @@
                   <a:srgbClr val="1B3B6F"/>
                 </a:solidFill>
                 <a:latin typeface="Amiri" pitchFamily="2" charset="-78"/>
+                <a:ea typeface="Amiri" pitchFamily="2" charset="-78"/>
                 <a:cs typeface="Amiri" pitchFamily="2" charset="-78"/>
               </a:rPr>
               <a:t>قُوَّةُ الأَلْوَانِ</a:t>
@@ -6056,6 +6096,7 @@
                   <a:srgbClr val="1B3B6F"/>
                 </a:solidFill>
                 <a:latin typeface="Amiri" pitchFamily="2" charset="-78"/>
+                <a:ea typeface="Amiri" pitchFamily="2" charset="-78"/>
                 <a:cs typeface="Amiri" pitchFamily="2" charset="-78"/>
               </a:rPr>
               <a:t>(ب)</a:t>
@@ -6162,6 +6203,7 @@
                   <a:srgbClr val="1B3B6F"/>
                 </a:solidFill>
                 <a:latin typeface="Amiri" pitchFamily="2" charset="-78"/>
+                <a:ea typeface="Amiri" pitchFamily="2" charset="-78"/>
                 <a:cs typeface="Amiri" pitchFamily="2" charset="-78"/>
               </a:rPr>
               <a:t>كَيْفَ تَسْتَعْمِلُ الشَّرِكَاتُ الأَلْوَانَ؟ · الأَلْوَانُ فِي الثَّقَافَاتِ المُخْتَلِفَةِ · تَجْرِبَةٌ لَاحَظْتَ فِيهَا تَأْثِيرَ لَوْنٍ · رَأْيُكَ وَاقْتِرَاحُكَ</a:t>
@@ -6361,6 +6403,7 @@
                   <a:srgbClr val="D4AF37"/>
                 </a:solidFill>
                 <a:latin typeface="Amiri" pitchFamily="2" charset="-78"/>
+                <a:ea typeface="Amiri" pitchFamily="2" charset="-78"/>
                 <a:cs typeface="Amiri" pitchFamily="2" charset="-78"/>
               </a:rPr>
               <a:t>م</a:t>
@@ -6681,6 +6724,7 @@
                   <a:srgbClr val="8A6D1E"/>
                 </a:solidFill>
                 <a:latin typeface="Amiri" pitchFamily="2" charset="-78"/>
+                <a:ea typeface="Amiri" pitchFamily="2" charset="-78"/>
                 <a:cs typeface="Amiri" pitchFamily="2" charset="-78"/>
               </a:rPr>
               <a:t>خُطَّةُ الكِتَابَةِ</a:t>
@@ -7305,6 +7349,7 @@
                   <a:srgbClr val="1B3B6F"/>
                 </a:solidFill>
                 <a:latin typeface="Amiri" pitchFamily="2" charset="-78"/>
+                <a:ea typeface="Amiri" pitchFamily="2" charset="-78"/>
                 <a:cs typeface="Amiri" pitchFamily="2" charset="-78"/>
               </a:rPr>
               <a:t>البُيُوتُ بَيْضَاءُ، وَأَبْوَابُهَا زَرْقَاءُ.</a:t>
@@ -7404,6 +7449,7 @@
                   <a:srgbClr val="1B3B6F"/>
                 </a:solidFill>
                 <a:latin typeface="Amiri" pitchFamily="2" charset="-78"/>
+                <a:ea typeface="Amiri" pitchFamily="2" charset="-78"/>
                 <a:cs typeface="Amiri" pitchFamily="2" charset="-78"/>
               </a:rPr>
               <a:t>كَانَتِ السَّمَاءُ حَمْرَاءَ وَقْتَ الغُرُوبِ.</a:t>
@@ -7503,6 +7549,7 @@
                   <a:srgbClr val="1B3B6F"/>
                 </a:solidFill>
                 <a:latin typeface="Amiri" pitchFamily="2" charset="-78"/>
+                <a:ea typeface="Amiri" pitchFamily="2" charset="-78"/>
                 <a:cs typeface="Amiri" pitchFamily="2" charset="-78"/>
               </a:rPr>
               <a:t>سَأَدْهَنُ البَابَ بِاللَّوْنِ الأَزْرَقِ.</a:t>
@@ -7664,6 +7711,7 @@
                   <a:srgbClr val="1F2A37"/>
                 </a:solidFill>
                 <a:latin typeface="Amiri" pitchFamily="2" charset="-78"/>
+                <a:ea typeface="Amiri" pitchFamily="2" charset="-78"/>
                 <a:cs typeface="Amiri" pitchFamily="2" charset="-78"/>
               </a:rPr>
               <a:t>أ</a:t>
@@ -7690,6 +7738,7 @@
                   <a:srgbClr val="1F2A37"/>
                 </a:solidFill>
                 <a:latin typeface="Amiri" pitchFamily="2" charset="-78"/>
+                <a:ea typeface="Amiri" pitchFamily="2" charset="-78"/>
                 <a:cs typeface="Amiri" pitchFamily="2" charset="-78"/>
               </a:rPr>
               <a:t>ب</a:t>
@@ -7836,6 +7885,7 @@
                   <a:srgbClr val="D4AF37"/>
                 </a:solidFill>
                 <a:latin typeface="Amiri" pitchFamily="2" charset="-78"/>
+                <a:ea typeface="Amiri" pitchFamily="2" charset="-78"/>
                 <a:cs typeface="Amiri" pitchFamily="2" charset="-78"/>
               </a:rPr>
               <a:t>م</a:t>
@@ -8093,6 +8143,7 @@
                   <a:srgbClr val="8A6D1E"/>
                 </a:solidFill>
                 <a:latin typeface="Amiri" pitchFamily="2" charset="-78"/>
+                <a:ea typeface="Amiri" pitchFamily="2" charset="-78"/>
                 <a:cs typeface="Amiri" pitchFamily="2" charset="-78"/>
               </a:rPr>
               <a:t>أ</a:t>
@@ -8157,6 +8208,7 @@
                   <a:srgbClr val="1B3B6F"/>
                 </a:solidFill>
                 <a:latin typeface="Amiri" pitchFamily="2" charset="-78"/>
+                <a:ea typeface="Amiri" pitchFamily="2" charset="-78"/>
                 <a:cs typeface="Amiri" pitchFamily="2" charset="-78"/>
               </a:rPr>
               <a:t>أ</a:t>
@@ -8208,6 +8260,7 @@
                   <a:srgbClr val="8A6D1E"/>
                 </a:solidFill>
                 <a:latin typeface="Amiri" pitchFamily="2" charset="-78"/>
+                <a:ea typeface="Amiri" pitchFamily="2" charset="-78"/>
                 <a:cs typeface="Amiri" pitchFamily="2" charset="-78"/>
               </a:rPr>
               <a:t>نَمُوذَجُ الإِجَابَةِ</a:t>
@@ -8321,6 +8374,7 @@
                   <a:srgbClr val="1F2A37"/>
                 </a:solidFill>
                 <a:latin typeface="Amiri" pitchFamily="2" charset="-78"/>
+                <a:ea typeface="Amiri" pitchFamily="2" charset="-78"/>
                 <a:cs typeface="Amiri" pitchFamily="2" charset="-78"/>
               </a:rPr>
               <a:t>مَدِينَتِي مَلِيئَةٌ بِالأَلْوَانِ. فِي وَسَطِ المَدِينَةِ سُوقٌ كَبِيرٌ، فِيهِ فَوَاكِهُ حَمْرَاءُ وَصَفْرَاءُ وَخَضْرَاءُ. البُيُوتُ القَدِيمَةُ بَيْضَاءُ، وَأَبْوَابُهَا زَرْقَاءُ. السَّمَاءُ زَرْقَاءُ صَافِيَةٌ فِي الصَّيْفِ، لٰكِنَّهَا رَمَادِيَّةٌ فِي الشِّتَاءِ. الحَافِلَاتُ فِي مَدِينَتِي حَمْرَاءُ، وَسَيَّارَاتُ الأُجْرَةِ سَوْدَاءُ.</a:t>
@@ -8340,6 +8394,7 @@
                   <a:srgbClr val="1F2A37"/>
                 </a:solidFill>
                 <a:latin typeface="Amiri" pitchFamily="2" charset="-78"/>
+                <a:ea typeface="Amiri" pitchFamily="2" charset="-78"/>
                 <a:cs typeface="Amiri" pitchFamily="2" charset="-78"/>
               </a:rPr>
               <a:t>لَوْنِيَ المُفَضَّلُ هُوَ الأَخْضَرُ، لِأَنَّهُ لَوْنُ الطَّبِيعَةِ. غُرْفَتِي خَضْرَاءُ فَاتِحَةٌ، وَسَتَائِرُهَا بَيْضَاءُ، وَسَرِيرِي بُنِّيٌّ. أَلْبَسُ الأَلْوَانَ الغَامِقَةَ فِي الشِّتَاءِ، وَالأَلْوَانَ الفَاتِحَةَ فِي الصَّيْفِ، لِأَنَّهَا أَبْرَدُ. حَقِيبَتِيَ المَدْرَسِيَّةُ خَضْرَاءُ أَيْضًا!</a:t>
@@ -8359,6 +8414,7 @@
                   <a:srgbClr val="1F2A37"/>
                 </a:solidFill>
                 <a:latin typeface="Amiri" pitchFamily="2" charset="-78"/>
+                <a:ea typeface="Amiri" pitchFamily="2" charset="-78"/>
                 <a:cs typeface="Amiri" pitchFamily="2" charset="-78"/>
               </a:rPr>
               <a:t>فِي الرَّبِيعِ المَاضِي زُرْتُ حَدِيقَةً كَبِيرَةً مَعَ أُسْرَتِي. رَأَيْنَا أَزْهَارًا حَمْرَاءَ وَوَرْدِيَّةً وَبَنَفْسَجِيَّةً، وَأَشْجَارًا خَضْرَاءَ عَالِيَةً. أَخَذْتُ صُوَرًا كَثِيرَةً، وَرَسَمْتُ لَوْحَةً لِلْحَدِيقَةِ فِي البَيْتِ. عَلَّقَتْ أُمِّي اللَّوْحَةَ فِي غُرْفَةِ الجُلُوسِ، وَكُنْتُ سَعِيدًا جِدًّا.</a:t>
@@ -8378,6 +8434,7 @@
                   <a:srgbClr val="1F2A37"/>
                 </a:solidFill>
                 <a:latin typeface="Amiri" pitchFamily="2" charset="-78"/>
+                <a:ea typeface="Amiri" pitchFamily="2" charset="-78"/>
                 <a:cs typeface="Amiri" pitchFamily="2" charset="-78"/>
               </a:rPr>
               <a:t>فِي رَأْيِي، الأَلْوَانُ تَجْعَلُ الحَيَاةَ جَمِيلَةً، وَتُغَيِّرُ مَشَاعِرَنَا. فِي المُسْتَقْبَلِ أُرِيدُ أَنْ أَدْرُسَ الفَنَّ، وَسَأَرْسُمُ لَوْحَاتٍ مُلَوَّنَةً لِمَدِينَتِي.</a:t>
@@ -8541,11 +8598,12 @@
               <a:buNone/>
             </a:pPr>
             <a:r>
-              <a:rPr lang="en-US" sz="950" b="1" dirty="0">
+              <a:rPr lang="ar-SA" sz="950" b="1" dirty="0">
                 <a:solidFill>
                   <a:srgbClr val="FFFFFF"/>
                 </a:solidFill>
                 <a:latin typeface="Calibri" pitchFamily="34" charset="0"/>
+                <a:ea typeface="Amiri" pitchFamily="2" charset="-78"/>
                 <a:cs typeface="Amiri" pitchFamily="2" charset="-78"/>
               </a:rPr>
               <a:t>فَوَاكِهُ حَمْرَاءُ</a:t>
@@ -8606,11 +8664,12 @@
               <a:buNone/>
             </a:pPr>
             <a:r>
-              <a:rPr lang="en-US" sz="950" b="1" dirty="0">
+              <a:rPr lang="ar-SA" sz="950" b="1" dirty="0">
                 <a:solidFill>
                   <a:srgbClr val="FFFFFF"/>
                 </a:solidFill>
                 <a:latin typeface="Calibri" pitchFamily="34" charset="0"/>
+                <a:ea typeface="Amiri" pitchFamily="2" charset="-78"/>
                 <a:cs typeface="Amiri" pitchFamily="2" charset="-78"/>
               </a:rPr>
               <a:t>أَبْوَابُهَا زَرْقَاءُ</a:t>
@@ -8671,11 +8730,12 @@
               <a:buNone/>
             </a:pPr>
             <a:r>
-              <a:rPr lang="en-US" sz="950" b="1" dirty="0">
+              <a:rPr lang="ar-SA" sz="950" b="1" dirty="0">
                 <a:solidFill>
                   <a:srgbClr val="FFFFFF"/>
                 </a:solidFill>
                 <a:latin typeface="Calibri" pitchFamily="34" charset="0"/>
+                <a:ea typeface="Amiri" pitchFamily="2" charset="-78"/>
                 <a:cs typeface="Amiri" pitchFamily="2" charset="-78"/>
               </a:rPr>
               <a:t>خَضْرَاءُ فَاتِحَةٌ</a:t>
@@ -8736,11 +8796,12 @@
               <a:buNone/>
             </a:pPr>
             <a:r>
-              <a:rPr lang="en-US" sz="950" b="1" dirty="0">
+              <a:rPr lang="ar-SA" sz="950" b="1" dirty="0">
                 <a:solidFill>
                   <a:srgbClr val="FFFFFF"/>
                 </a:solidFill>
                 <a:latin typeface="Calibri" pitchFamily="34" charset="0"/>
+                <a:ea typeface="Amiri" pitchFamily="2" charset="-78"/>
                 <a:cs typeface="Amiri" pitchFamily="2" charset="-78"/>
               </a:rPr>
               <a:t>سَأَرْسُمُ</a:t>
@@ -8874,6 +8935,7 @@
                   <a:srgbClr val="D4AF37"/>
                 </a:solidFill>
                 <a:latin typeface="Amiri" pitchFamily="2" charset="-78"/>
+                <a:ea typeface="Amiri" pitchFamily="2" charset="-78"/>
                 <a:cs typeface="Amiri" pitchFamily="2" charset="-78"/>
               </a:rPr>
               <a:t>م</a:t>
@@ -9131,6 +9193,7 @@
                   <a:srgbClr val="8A6D1E"/>
                 </a:solidFill>
                 <a:latin typeface="Amiri" pitchFamily="2" charset="-78"/>
+                <a:ea typeface="Amiri" pitchFamily="2" charset="-78"/>
                 <a:cs typeface="Amiri" pitchFamily="2" charset="-78"/>
               </a:rPr>
               <a:t>أ</a:t>
@@ -9195,6 +9258,7 @@
                   <a:srgbClr val="1B3B6F"/>
                 </a:solidFill>
                 <a:latin typeface="Amiri" pitchFamily="2" charset="-78"/>
+                <a:ea typeface="Amiri" pitchFamily="2" charset="-78"/>
                 <a:cs typeface="Amiri" pitchFamily="2" charset="-78"/>
               </a:rPr>
               <a:t>أ</a:t>
@@ -9246,6 +9310,7 @@
                   <a:srgbClr val="8A6D1E"/>
                 </a:solidFill>
                 <a:latin typeface="Amiri" pitchFamily="2" charset="-78"/>
+                <a:ea typeface="Amiri" pitchFamily="2" charset="-78"/>
                 <a:cs typeface="Amiri" pitchFamily="2" charset="-78"/>
               </a:rPr>
               <a:t>نَمُوذَجُ الإِجَابَةِ</a:t>
@@ -9359,6 +9424,7 @@
                   <a:srgbClr val="1F2A37"/>
                 </a:solidFill>
                 <a:latin typeface="Amiri" pitchFamily="2" charset="-78"/>
+                <a:ea typeface="Amiri" pitchFamily="2" charset="-78"/>
                 <a:cs typeface="Amiri" pitchFamily="2" charset="-78"/>
               </a:rPr>
               <a:t>لَوْ سَأَلْتَنِي عَنْ لَوْنِ طُفُولَتِي، لَقُلْتُ إِنَّهُ أَزْرَقُ: أَزْرَقُ البَحْرِ الَّذِي كُنْتُ أَرَاهُ مِنْ نَافِذَةِ بَيْتِ جَدِّي فِي الإِسْكَنْدَرِيَّةِ، وَأَزْرَقُ البَابِ الخَشَبِيِّ القَدِيمِ الَّذِي كَانَتْ جَدَّتِي تَدْهَنُهُ كُلَّ صَيْفٍ.</a:t>
@@ -9378,6 +9444,7 @@
                   <a:srgbClr val="1F2A37"/>
                 </a:solidFill>
                 <a:latin typeface="Amiri" pitchFamily="2" charset="-78"/>
+                <a:ea typeface="Amiri" pitchFamily="2" charset="-78"/>
                 <a:cs typeface="Amiri" pitchFamily="2" charset="-78"/>
               </a:rPr>
               <a:t>اليَوْمَ أَسْكُنُ فِي مَدِينَةٍ بِرِيطَانِيَّةٍ أَغْلَبُ مَبَانِيهَا مِنَ الطُّوبِ الأَحْمَرِ، وَسَمَاؤُهَا رَمَادِيَّةٌ مُعْظَمَ أَيَّامِ السَّنَةِ، وَلِذٰلِكَ أُحَاوِلُ أَنْ أُدْخِلَ الأَلْوَانَ إِلَى حَيَاتِي: فِي مَلَابِسِي، وَفِي دَفَاتِرِي، وَفِي الأَزْهَارِ الصَّفْرَاءِ عَلَى نَافِذَتِي، وَحَتَّى فِي جَوَارِبِي المُخَطَّطَةِ الَّتِي يَضْحَكُ مِنْهَا أَصْدِقَائِي.</a:t>
@@ -9397,6 +9464,7 @@
                   <a:srgbClr val="1F2A37"/>
                 </a:solidFill>
                 <a:latin typeface="Amiri" pitchFamily="2" charset="-78"/>
+                <a:ea typeface="Amiri" pitchFamily="2" charset="-78"/>
                 <a:cs typeface="Amiri" pitchFamily="2" charset="-78"/>
               </a:rPr>
               <a:t>فِي الصَّيْفِ المَاضِي رَجَعْتُ إِلَى الإِسْكَنْدَرِيَّةِ بَعْدَ غِيَابٍ طَوِيلٍ، فَوَجَدْتُ البَابَ قَدْ أَصْبَحَ بُنِّيًّا بَاهِتًا، لِأَنَّ جَدَّتِي لَمْ تَعُدْ تَسْتَطِيعُ أَنْ تَدْهَنَهُ. فَاشْتَرَيْتُ عُلْبَةَ دِهَانٍ زَرْقَاءَ، وَقَضَيْتُ يَوْمًا كَامِلًا أُعِيدُ إِلَيْهِ لَوْنَهُ، بَيْنَمَا كَانَتْ جَدَّتِي تَجْلِسُ بِجَانِبِي وَتَحْكِي لِي قِصَصَ البَيْتِ.</a:t>
@@ -9416,6 +9484,7 @@
                   <a:srgbClr val="1F2A37"/>
                 </a:solidFill>
                 <a:latin typeface="Amiri" pitchFamily="2" charset="-78"/>
+                <a:ea typeface="Amiri" pitchFamily="2" charset="-78"/>
                 <a:cs typeface="Amiri" pitchFamily="2" charset="-78"/>
               </a:rPr>
               <a:t>صَحِيحٌ أَنَّ الأَلْوَانَ تَبْدُو شَيْئًا بَسِيطًا، غَيْرَ أَنَّهَا تَحْمِلُ ذِكْرَيَاتِنَا وَمَشَاعِرَنَا. وَفِي المُسْتَقْبَلِ، عِنْدَمَا يَكُونُ لِي بَيْتٌ، سَأَدْهَنُ بَابَهُ بِالأَزْرَقِ نَفْسِهِ، لِيَبْقَى بَيْتُ جَدَّتِي مَعِي دَائِمًا.</a:t>
@@ -9514,11 +9583,12 @@
               <a:buNone/>
             </a:pPr>
             <a:r>
-              <a:rPr lang="en-US" sz="950" b="1" dirty="0">
+              <a:rPr lang="ar-SA" sz="950" b="1" dirty="0">
                 <a:solidFill>
                   <a:srgbClr val="FFFFFF"/>
                 </a:solidFill>
                 <a:latin typeface="Calibri" pitchFamily="34" charset="0"/>
+                <a:ea typeface="Amiri" pitchFamily="2" charset="-78"/>
                 <a:cs typeface="Amiri" pitchFamily="2" charset="-78"/>
               </a:rPr>
               <a:t>لَوْ سَأَلْتَنِي … لَقُلْتُ</a:t>
@@ -9579,11 +9649,12 @@
               <a:buNone/>
             </a:pPr>
             <a:r>
-              <a:rPr lang="en-US" sz="950" b="1" dirty="0">
+              <a:rPr lang="ar-SA" sz="950" b="1" dirty="0">
                 <a:solidFill>
                   <a:srgbClr val="FFFFFF"/>
                 </a:solidFill>
                 <a:latin typeface="Calibri" pitchFamily="34" charset="0"/>
+                <a:ea typeface="Amiri" pitchFamily="2" charset="-78"/>
                 <a:cs typeface="Amiri" pitchFamily="2" charset="-78"/>
               </a:rPr>
               <a:t>الَّذِي كَانَتْ جَدَّتِي تَدْهَنُهُ</a:t>
@@ -9644,11 +9715,12 @@
               <a:buNone/>
             </a:pPr>
             <a:r>
-              <a:rPr lang="en-US" sz="950" b="1" dirty="0">
+              <a:rPr lang="ar-SA" sz="950" b="1" dirty="0">
                 <a:solidFill>
                   <a:srgbClr val="FFFFFF"/>
                 </a:solidFill>
                 <a:latin typeface="Calibri" pitchFamily="34" charset="0"/>
+                <a:ea typeface="Amiri" pitchFamily="2" charset="-78"/>
                 <a:cs typeface="Amiri" pitchFamily="2" charset="-78"/>
               </a:rPr>
               <a:t>قَدْ أَصْبَحَ بُنِّيًّا بَاهِتًا</a:t>
@@ -9709,11 +9781,12 @@
               <a:buNone/>
             </a:pPr>
             <a:r>
-              <a:rPr lang="en-US" sz="950" b="1" dirty="0">
+              <a:rPr lang="ar-SA" sz="950" b="1" dirty="0">
                 <a:solidFill>
                   <a:srgbClr val="FFFFFF"/>
                 </a:solidFill>
                 <a:latin typeface="Calibri" pitchFamily="34" charset="0"/>
+                <a:ea typeface="Amiri" pitchFamily="2" charset="-78"/>
                 <a:cs typeface="Amiri" pitchFamily="2" charset="-78"/>
               </a:rPr>
               <a:t>لَمْ تَعُدْ تَسْتَطِيعُ</a:t>
@@ -9847,6 +9920,7 @@
                   <a:srgbClr val="D4AF37"/>
                 </a:solidFill>
                 <a:latin typeface="Amiri" pitchFamily="2" charset="-78"/>
+                <a:ea typeface="Amiri" pitchFamily="2" charset="-78"/>
                 <a:cs typeface="Amiri" pitchFamily="2" charset="-78"/>
               </a:rPr>
               <a:t>م</a:t>
@@ -10104,6 +10178,7 @@
                   <a:srgbClr val="8A6D1E"/>
                 </a:solidFill>
                 <a:latin typeface="Amiri" pitchFamily="2" charset="-78"/>
+                <a:ea typeface="Amiri" pitchFamily="2" charset="-78"/>
                 <a:cs typeface="Amiri" pitchFamily="2" charset="-78"/>
               </a:rPr>
               <a:t>ب</a:t>
@@ -10168,6 +10243,7 @@
                   <a:srgbClr val="1B3B6F"/>
                 </a:solidFill>
                 <a:latin typeface="Amiri" pitchFamily="2" charset="-78"/>
+                <a:ea typeface="Amiri" pitchFamily="2" charset="-78"/>
                 <a:cs typeface="Amiri" pitchFamily="2" charset="-78"/>
               </a:rPr>
               <a:t>ب</a:t>
@@ -10219,6 +10295,7 @@
                   <a:srgbClr val="8A6D1E"/>
                 </a:solidFill>
                 <a:latin typeface="Amiri" pitchFamily="2" charset="-78"/>
+                <a:ea typeface="Amiri" pitchFamily="2" charset="-78"/>
                 <a:cs typeface="Amiri" pitchFamily="2" charset="-78"/>
               </a:rPr>
               <a:t>نَمُوذَجُ الإِجَابَةِ</a:t>
@@ -10332,6 +10409,7 @@
                   <a:srgbClr val="1F2A37"/>
                 </a:solidFill>
                 <a:latin typeface="Amiri" pitchFamily="2" charset="-78"/>
+                <a:ea typeface="Amiri" pitchFamily="2" charset="-78"/>
                 <a:cs typeface="Amiri" pitchFamily="2" charset="-78"/>
               </a:rPr>
               <a:t>نَعِيشُ فِي عَالَمٍ مِنَ الأَلْوَانِ، لٰكِنَّنَا نَادِرًا مَا نُفَكِّرُ فِي تَأْثِيرِهَا فِينَا. فَالشَّرِكَاتُ تَخْتَارُ أَلْوَانَ مُنْتَجَاتِهَا بِعِنَايَةٍ: الأَحْمَرُ لِلْمَطَاعِمِ السَّرِيعَةِ لِأَنَّهُ يَفْتَحُ الشَّهِيَّةَ، وَالأَزْرَقُ لِلْبُنُوكِ لِأَنَّهُ يُوحِي بِالثِّقَةِ، وَالأَخْضَرُ لِلْمُنْتَجَاتِ الطَّبِيعِيَّةِ، وَالأَسْوَدُ لِلسِّلَعِ الفَاخِرَةِ الغَالِيَةِ.</a:t>
@@ -10351,6 +10429,7 @@
                   <a:srgbClr val="1F2A37"/>
                 </a:solidFill>
                 <a:latin typeface="Amiri" pitchFamily="2" charset="-78"/>
+                <a:ea typeface="Amiri" pitchFamily="2" charset="-78"/>
                 <a:cs typeface="Amiri" pitchFamily="2" charset="-78"/>
               </a:rPr>
               <a:t>وَتَخْتَلِفُ مَعَانِي الأَلْوَانِ بَيْنَ الثَّقَافَاتِ أَيْضًا؛ فَالأَبْيَضُ لَوْنُ الفَرَحِ فِي الأَعْرَاسِ الغَرْبِيَّةِ، بَيْنَمَا يَرْتَبِطُ بِالحُزْنِ فِي بَعْضِ ثَقَافَاتِ آسْيَا، أَمَّا الأَخْضَرُ فَلَهُ مَكَانَةٌ خَاصَّةٌ فِي الثَّقَافَةِ الإِسْلَامِيَّةِ.</a:t>
@@ -10370,6 +10449,7 @@
                   <a:srgbClr val="1F2A37"/>
                 </a:solidFill>
                 <a:latin typeface="Amiri" pitchFamily="2" charset="-78"/>
+                <a:ea typeface="Amiri" pitchFamily="2" charset="-78"/>
                 <a:cs typeface="Amiri" pitchFamily="2" charset="-78"/>
               </a:rPr>
               <a:t>لَاحَظْتُ تَأْثِيرَ الأَلْوَانِ بِنَفْسِي عِنْدَمَا دَهَنَتْ مَدْرَسَتُنَا مَكْتَبَتَهَا فِي السَّنَةِ المَاضِيَةِ؛ كَانَتْ جُدْرَانُهَا رَمَادِيَّةً كَئِيبَةً، فَأَصْبَحَتْ خَضْرَاءَ فَاتِحَةً وَصَفْرَاءَ. وَبَعْدَ شَهْرٍ وَاحِدٍ تَضَاعَفَ عَدَدُ الطُّلَّابِ الَّذِينَ يَقْرَؤُونَ فِيهَا فِي الاسْتِرَاحَةِ، وَقَالَتْ أَمِينَةُ المَكْتَبَةِ إِنَّ المَكَانَ صَارَ أَهْدَأَ وَأَجْمَلَ.</a:t>
@@ -10389,6 +10469,7 @@
                   <a:srgbClr val="1F2A37"/>
                 </a:solidFill>
                 <a:latin typeface="Amiri" pitchFamily="2" charset="-78"/>
+                <a:ea typeface="Amiri" pitchFamily="2" charset="-78"/>
                 <a:cs typeface="Amiri" pitchFamily="2" charset="-78"/>
               </a:rPr>
               <a:t>صَحِيحٌ أَنَّ تَأْثِيرَ الأَلْوَانِ يَخْتَلِفُ مِنْ شَخْصٍ إِلَى آخَرَ، غَيْرَ أَنَّهُ حَقِيقِيٌّ وَلَا يُمْكِنُ تَجَاهُلُهُ. وَلَوِ اهْتَمَّتِ المَدَارِسُ وَالمُسْتَشْفَيَاتُ بِأَلْوَانِ جُدْرَانِهَا، لَشَعَرَ النَّاسُ فِيهَا بِرَاحَةٍ أَكْبَرَ، وَلَتَحَسَّنَتْ حَالَتُهُمُ النَّفْسِيَّةُ كَثِيرًا.</a:t>
@@ -10487,11 +10568,12 @@
               <a:buNone/>
             </a:pPr>
             <a:r>
-              <a:rPr lang="en-US" sz="950" b="1" dirty="0">
+              <a:rPr lang="ar-SA" sz="950" b="1" dirty="0">
                 <a:solidFill>
                   <a:srgbClr val="FFFFFF"/>
                 </a:solidFill>
                 <a:latin typeface="Calibri" pitchFamily="34" charset="0"/>
+                <a:ea typeface="Amiri" pitchFamily="2" charset="-78"/>
                 <a:cs typeface="Amiri" pitchFamily="2" charset="-78"/>
               </a:rPr>
               <a:t>نَادِرًا مَا نُفَكِّرُ</a:t>
@@ -10552,11 +10634,12 @@
               <a:buNone/>
             </a:pPr>
             <a:r>
-              <a:rPr lang="en-US" sz="950" b="1" dirty="0">
+              <a:rPr lang="ar-SA" sz="950" b="1" dirty="0">
                 <a:solidFill>
                   <a:srgbClr val="FFFFFF"/>
                 </a:solidFill>
                 <a:latin typeface="Calibri" pitchFamily="34" charset="0"/>
+                <a:ea typeface="Amiri" pitchFamily="2" charset="-78"/>
                 <a:cs typeface="Amiri" pitchFamily="2" charset="-78"/>
               </a:rPr>
               <a:t>بَيْنَمَا يَرْتَبِطُ</a:t>
@@ -10617,11 +10700,12 @@
               <a:buNone/>
             </a:pPr>
             <a:r>
-              <a:rPr lang="en-US" sz="950" b="1" dirty="0">
+              <a:rPr lang="ar-SA" sz="950" b="1" dirty="0">
                 <a:solidFill>
                   <a:srgbClr val="FFFFFF"/>
                 </a:solidFill>
                 <a:latin typeface="Calibri" pitchFamily="34" charset="0"/>
+                <a:ea typeface="Amiri" pitchFamily="2" charset="-78"/>
                 <a:cs typeface="Amiri" pitchFamily="2" charset="-78"/>
               </a:rPr>
               <a:t>أَمَّا الأَخْضَرُ فَلَهُ</a:t>
@@ -10682,11 +10766,12 @@
               <a:buNone/>
             </a:pPr>
             <a:r>
-              <a:rPr lang="en-US" sz="950" b="1" dirty="0">
+              <a:rPr lang="ar-SA" sz="950" b="1" dirty="0">
                 <a:solidFill>
                   <a:srgbClr val="FFFFFF"/>
                 </a:solidFill>
                 <a:latin typeface="Calibri" pitchFamily="34" charset="0"/>
+                <a:ea typeface="Amiri" pitchFamily="2" charset="-78"/>
                 <a:cs typeface="Amiri" pitchFamily="2" charset="-78"/>
               </a:rPr>
               <a:t>لَوِ اهْتَمَّتْ … لَشَعَرَ</a:t>
@@ -10820,6 +10905,7 @@
                   <a:srgbClr val="D4AF37"/>
                 </a:solidFill>
                 <a:latin typeface="Amiri" pitchFamily="2" charset="-78"/>
+                <a:ea typeface="Amiri" pitchFamily="2" charset="-78"/>
                 <a:cs typeface="Amiri" pitchFamily="2" charset="-78"/>
               </a:rPr>
               <a:t>م</a:t>
@@ -11140,6 +11226,7 @@
                   <a:srgbClr val="8A6D1E"/>
                 </a:solidFill>
                 <a:latin typeface="Amiri" pitchFamily="2" charset="-78"/>
+                <a:ea typeface="Amiri" pitchFamily="2" charset="-78"/>
                 <a:cs typeface="Amiri" pitchFamily="2" charset="-78"/>
               </a:rPr>
               <a:t>قَيِّمْ عَمَلَكَ</a:t>
@@ -12384,6 +12471,7 @@
                   <a:srgbClr val="FFFFFF"/>
                 </a:solidFill>
                 <a:latin typeface="Amiri" pitchFamily="2" charset="-78"/>
+                <a:ea typeface="Amiri" pitchFamily="2" charset="-78"/>
                 <a:cs typeface="Amiri" pitchFamily="2" charset="-78"/>
               </a:rPr>
               <a:t>أَحْسَنْتُمْ! إِلَى اللِّقَاءِ</a:t>
@@ -12536,6 +12624,7 @@
                   <a:srgbClr val="D4AF37"/>
                 </a:solidFill>
                 <a:latin typeface="Amiri" pitchFamily="2" charset="-78"/>
+                <a:ea typeface="Amiri" pitchFamily="2" charset="-78"/>
                 <a:cs typeface="Amiri" pitchFamily="2" charset="-78"/>
               </a:rPr>
               <a:t>وَرْشَةُ التَّدْرِيبِ</a:t>
@@ -12669,6 +12758,7 @@
                   <a:srgbClr val="D4AF37"/>
                 </a:solidFill>
                 <a:latin typeface="Amiri" pitchFamily="2" charset="-78"/>
+                <a:ea typeface="Amiri" pitchFamily="2" charset="-78"/>
                 <a:cs typeface="Amiri" pitchFamily="2" charset="-78"/>
               </a:rPr>
               <a:t>م</a:t>
@@ -12989,6 +13079,7 @@
                   <a:srgbClr val="8A6D1E"/>
                 </a:solidFill>
                 <a:latin typeface="Amiri" pitchFamily="2" charset="-78"/>
+                <a:ea typeface="Amiri" pitchFamily="2" charset="-78"/>
                 <a:cs typeface="Amiri" pitchFamily="2" charset="-78"/>
               </a:rPr>
               <a:t>آدَابُ الصَّفِّ</a:t>
@@ -14520,6 +14611,7 @@
                   <a:srgbClr val="D4AF37"/>
                 </a:solidFill>
                 <a:latin typeface="Amiri" pitchFamily="2" charset="-78"/>
+                <a:ea typeface="Amiri" pitchFamily="2" charset="-78"/>
                 <a:cs typeface="Amiri" pitchFamily="2" charset="-78"/>
               </a:rPr>
               <a:t>م</a:t>
@@ -14840,6 +14932,7 @@
                   <a:srgbClr val="8A6D1E"/>
                 </a:solidFill>
                 <a:latin typeface="Amiri" pitchFamily="2" charset="-78"/>
+                <a:ea typeface="Amiri" pitchFamily="2" charset="-78"/>
                 <a:cs typeface="Amiri" pitchFamily="2" charset="-78"/>
               </a:rPr>
               <a:t>خَرِيطَةُ الوَرْشَةِ</a:t>
@@ -15154,6 +15247,7 @@
                   <a:srgbClr val="1B3B6F"/>
                 </a:solidFill>
                 <a:latin typeface="Amiri" pitchFamily="2" charset="-78"/>
+                <a:ea typeface="Amiri" pitchFamily="2" charset="-78"/>
                 <a:cs typeface="Amiri" pitchFamily="2" charset="-78"/>
               </a:rPr>
               <a:t>كَيْفَ</a:t>
@@ -15430,6 +15524,7 @@
                   <a:srgbClr val="1E6B52"/>
                 </a:solidFill>
                 <a:latin typeface="Amiri" pitchFamily="2" charset="-78"/>
+                <a:ea typeface="Amiri" pitchFamily="2" charset="-78"/>
                 <a:cs typeface="Amiri" pitchFamily="2" charset="-78"/>
               </a:rPr>
               <a:t>الاسْتِمَارَةُ</a:t>
@@ -15706,6 +15801,7 @@
                   <a:srgbClr val="1E6B52"/>
                 </a:solidFill>
                 <a:latin typeface="Amiri" pitchFamily="2" charset="-78"/>
+                <a:ea typeface="Amiri" pitchFamily="2" charset="-78"/>
                 <a:cs typeface="Amiri" pitchFamily="2" charset="-78"/>
               </a:rPr>
               <a:t>الرِّسَالَةُ</a:t>
@@ -15982,6 +16078,7 @@
                   <a:srgbClr val="1E6B52"/>
                 </a:solidFill>
                 <a:latin typeface="Amiri" pitchFamily="2" charset="-78"/>
+                <a:ea typeface="Amiri" pitchFamily="2" charset="-78"/>
                 <a:cs typeface="Amiri" pitchFamily="2" charset="-78"/>
               </a:rPr>
               <a:t>المَقَالُ</a:t>
@@ -16258,6 +16355,7 @@
                   <a:srgbClr val="8A6D1E"/>
                 </a:solidFill>
                 <a:latin typeface="Amiri" pitchFamily="2" charset="-78"/>
+                <a:ea typeface="Amiri" pitchFamily="2" charset="-78"/>
                 <a:cs typeface="Amiri" pitchFamily="2" charset="-78"/>
               </a:rPr>
               <a:t>قَيِّمْ</a:t>
@@ -16501,6 +16599,7 @@
                   <a:srgbClr val="D4AF37"/>
                 </a:solidFill>
                 <a:latin typeface="Amiri" pitchFamily="2" charset="-78"/>
+                <a:ea typeface="Amiri" pitchFamily="2" charset="-78"/>
                 <a:cs typeface="Amiri" pitchFamily="2" charset="-78"/>
               </a:rPr>
               <a:t>م</a:t>
@@ -16821,6 +16920,7 @@
                   <a:srgbClr val="8A6D1E"/>
                 </a:solidFill>
                 <a:latin typeface="Amiri" pitchFamily="2" charset="-78"/>
+                <a:ea typeface="Amiri" pitchFamily="2" charset="-78"/>
                 <a:cs typeface="Amiri" pitchFamily="2" charset="-78"/>
               </a:rPr>
               <a:t>امْتِحَانُ الكِتَابَةِ</a:t>
@@ -17445,6 +17545,7 @@
                   <a:srgbClr val="1B3B6F"/>
                 </a:solidFill>
                 <a:latin typeface="Amiri" pitchFamily="2" charset="-78"/>
+                <a:ea typeface="Amiri" pitchFamily="2" charset="-78"/>
                 <a:cs typeface="Amiri" pitchFamily="2" charset="-78"/>
               </a:rPr>
               <a:t>فُسْتَانٌ أَزْرَقُ فَاتِحٌ مَصْنُوعٌ مِنَ الحَرِيرِ</a:t>
@@ -17544,6 +17645,7 @@
                   <a:srgbClr val="1B3B6F"/>
                 </a:solidFill>
                 <a:latin typeface="Amiri" pitchFamily="2" charset="-78"/>
+                <a:ea typeface="Amiri" pitchFamily="2" charset="-78"/>
                 <a:cs typeface="Amiri" pitchFamily="2" charset="-78"/>
               </a:rPr>
               <a:t>حَقِيبَةٌ جِلْدِيَّةٌ سَوْدَاءُ</a:t>
@@ -17643,6 +17745,7 @@
                   <a:srgbClr val="1B3B6F"/>
                 </a:solidFill>
                 <a:latin typeface="Amiri" pitchFamily="2" charset="-78"/>
+                <a:ea typeface="Amiri" pitchFamily="2" charset="-78"/>
                 <a:cs typeface="Amiri" pitchFamily="2" charset="-78"/>
               </a:rPr>
               <a:t>عَلَيْهِ زُهُورٌ بَيْضَاءُ صَغِيرَةٌ</a:t>
@@ -17814,6 +17917,7 @@
                   <a:srgbClr val="D4AF37"/>
                 </a:solidFill>
                 <a:latin typeface="Amiri" pitchFamily="2" charset="-78"/>
+                <a:ea typeface="Amiri" pitchFamily="2" charset="-78"/>
                 <a:cs typeface="Amiri" pitchFamily="2" charset="-78"/>
               </a:rPr>
               <a:t>م</a:t>
@@ -18134,6 +18238,7 @@
                   <a:srgbClr val="8A6D1E"/>
                 </a:solidFill>
                 <a:latin typeface="Amiri" pitchFamily="2" charset="-78"/>
+                <a:ea typeface="Amiri" pitchFamily="2" charset="-78"/>
                 <a:cs typeface="Amiri" pitchFamily="2" charset="-78"/>
               </a:rPr>
               <a:t>تَقْرِيرٌ عَنْ شَيْءٍ مَفْقُودٍ</a:t>
@@ -18490,6 +18595,7 @@
                   <a:srgbClr val="1B3B6F"/>
                 </a:solidFill>
                 <a:latin typeface="Amiri" pitchFamily="2" charset="-78"/>
+                <a:ea typeface="Amiri" pitchFamily="2" charset="-78"/>
                 <a:cs typeface="Amiri" pitchFamily="2" charset="-78"/>
               </a:rPr>
               <a:t>الاسْمُ</a:t>
@@ -18734,6 +18840,7 @@
                   <a:srgbClr val="1B3B6F"/>
                 </a:solidFill>
                 <a:latin typeface="Amiri" pitchFamily="2" charset="-78"/>
+                <a:ea typeface="Amiri" pitchFamily="2" charset="-78"/>
                 <a:cs typeface="Amiri" pitchFamily="2" charset="-78"/>
               </a:rPr>
               <a:t>الشَّيْءُ المَفْقُودُ</a:t>
@@ -18978,6 +19085,7 @@
                   <a:srgbClr val="1B3B6F"/>
                 </a:solidFill>
                 <a:latin typeface="Amiri" pitchFamily="2" charset="-78"/>
+                <a:ea typeface="Amiri" pitchFamily="2" charset="-78"/>
                 <a:cs typeface="Amiri" pitchFamily="2" charset="-78"/>
               </a:rPr>
               <a:t>اللَّوْنُ</a:t>
@@ -19222,6 +19330,7 @@
                   <a:srgbClr val="1B3B6F"/>
                 </a:solidFill>
                 <a:latin typeface="Amiri" pitchFamily="2" charset="-78"/>
+                <a:ea typeface="Amiri" pitchFamily="2" charset="-78"/>
                 <a:cs typeface="Amiri" pitchFamily="2" charset="-78"/>
               </a:rPr>
               <a:t>الحَجْمُ</a:t>
@@ -19466,6 +19575,7 @@
                   <a:srgbClr val="1B3B6F"/>
                 </a:solidFill>
                 <a:latin typeface="Amiri" pitchFamily="2" charset="-78"/>
+                <a:ea typeface="Amiri" pitchFamily="2" charset="-78"/>
                 <a:cs typeface="Amiri" pitchFamily="2" charset="-78"/>
               </a:rPr>
               <a:t>مَصْنُوعٌ مِنْ …</a:t>
@@ -19710,6 +19820,7 @@
                   <a:srgbClr val="1B3B6F"/>
                 </a:solidFill>
                 <a:latin typeface="Amiri" pitchFamily="2" charset="-78"/>
+                <a:ea typeface="Amiri" pitchFamily="2" charset="-78"/>
                 <a:cs typeface="Amiri" pitchFamily="2" charset="-78"/>
               </a:rPr>
               <a:t>أَيْنَ وَمَتَى فَقَدْتَهُ؟</a:t>
@@ -19954,6 +20065,7 @@
                   <a:srgbClr val="1B3B6F"/>
                 </a:solidFill>
                 <a:latin typeface="Amiri" pitchFamily="2" charset="-78"/>
+                <a:ea typeface="Amiri" pitchFamily="2" charset="-78"/>
                 <a:cs typeface="Amiri" pitchFamily="2" charset="-78"/>
               </a:rPr>
               <a:t>عَلَامَةٌ مُمَيِّزَةٌ</a:t>
@@ -20133,6 +20245,7 @@
                   <a:srgbClr val="1B3B6F"/>
                 </a:solidFill>
                 <a:latin typeface="Amiri" pitchFamily="2" charset="-78"/>
+                <a:ea typeface="Amiri" pitchFamily="2" charset="-78"/>
                 <a:cs typeface="Amiri" pitchFamily="2" charset="-78"/>
               </a:rPr>
               <a:t>جُمْلَةٌ: مَاذَا كَانَ فِيهَا؟</a:t>
@@ -20342,6 +20455,7 @@
                   <a:srgbClr val="D4AF37"/>
                 </a:solidFill>
                 <a:latin typeface="Amiri" pitchFamily="2" charset="-78"/>
+                <a:ea typeface="Amiri" pitchFamily="2" charset="-78"/>
                 <a:cs typeface="Amiri" pitchFamily="2" charset="-78"/>
               </a:rPr>
               <a:t>م</a:t>
@@ -20662,6 +20776,7 @@
                   <a:srgbClr val="8A6D1E"/>
                 </a:solidFill>
                 <a:latin typeface="Amiri" pitchFamily="2" charset="-78"/>
+                <a:ea typeface="Amiri" pitchFamily="2" charset="-78"/>
                 <a:cs typeface="Amiri" pitchFamily="2" charset="-78"/>
               </a:rPr>
               <a:t>نَمُوذَجُ الإِجَابَةِ</a:t>
@@ -20980,6 +21095,7 @@
                   <a:srgbClr val="1B3B6F"/>
                 </a:solidFill>
                 <a:latin typeface="Amiri" pitchFamily="2" charset="-78"/>
+                <a:ea typeface="Amiri" pitchFamily="2" charset="-78"/>
                 <a:cs typeface="Amiri" pitchFamily="2" charset="-78"/>
               </a:rPr>
               <a:t>مَرْيَمُ حَسَنٌ</a:t>
@@ -21018,6 +21134,7 @@
                   <a:srgbClr val="1B3B6F"/>
                 </a:solidFill>
                 <a:latin typeface="Amiri" pitchFamily="2" charset="-78"/>
+                <a:ea typeface="Amiri" pitchFamily="2" charset="-78"/>
                 <a:cs typeface="Amiri" pitchFamily="2" charset="-78"/>
               </a:rPr>
               <a:t>الاسْمُ</a:t>
@@ -21159,6 +21276,7 @@
                   <a:srgbClr val="1B3B6F"/>
                 </a:solidFill>
                 <a:latin typeface="Amiri" pitchFamily="2" charset="-78"/>
+                <a:ea typeface="Amiri" pitchFamily="2" charset="-78"/>
                 <a:cs typeface="Amiri" pitchFamily="2" charset="-78"/>
               </a:rPr>
               <a:t>حَقِيبَةُ ظَهْرٍ</a:t>
@@ -21197,6 +21315,7 @@
                   <a:srgbClr val="1B3B6F"/>
                 </a:solidFill>
                 <a:latin typeface="Amiri" pitchFamily="2" charset="-78"/>
+                <a:ea typeface="Amiri" pitchFamily="2" charset="-78"/>
                 <a:cs typeface="Amiri" pitchFamily="2" charset="-78"/>
               </a:rPr>
               <a:t>الشَّيْءُ المَفْقُودُ</a:t>
@@ -21338,6 +21457,7 @@
                   <a:srgbClr val="1B3B6F"/>
                 </a:solidFill>
                 <a:latin typeface="Amiri" pitchFamily="2" charset="-78"/>
+                <a:ea typeface="Amiri" pitchFamily="2" charset="-78"/>
                 <a:cs typeface="Amiri" pitchFamily="2" charset="-78"/>
               </a:rPr>
               <a:t>زَرْقَاءُ غَامِقَةٌ</a:t>
@@ -21376,6 +21496,7 @@
                   <a:srgbClr val="1B3B6F"/>
                 </a:solidFill>
                 <a:latin typeface="Amiri" pitchFamily="2" charset="-78"/>
+                <a:ea typeface="Amiri" pitchFamily="2" charset="-78"/>
                 <a:cs typeface="Amiri" pitchFamily="2" charset="-78"/>
               </a:rPr>
               <a:t>اللَّوْنُ</a:t>
@@ -21517,6 +21638,7 @@
                   <a:srgbClr val="1B3B6F"/>
                 </a:solidFill>
                 <a:latin typeface="Amiri" pitchFamily="2" charset="-78"/>
+                <a:ea typeface="Amiri" pitchFamily="2" charset="-78"/>
                 <a:cs typeface="Amiri" pitchFamily="2" charset="-78"/>
               </a:rPr>
               <a:t>كَبِيرَةٌ</a:t>
@@ -21555,6 +21677,7 @@
                   <a:srgbClr val="1B3B6F"/>
                 </a:solidFill>
                 <a:latin typeface="Amiri" pitchFamily="2" charset="-78"/>
+                <a:ea typeface="Amiri" pitchFamily="2" charset="-78"/>
                 <a:cs typeface="Amiri" pitchFamily="2" charset="-78"/>
               </a:rPr>
               <a:t>الحَجْمُ</a:t>
@@ -21696,6 +21819,7 @@
                   <a:srgbClr val="1B3B6F"/>
                 </a:solidFill>
                 <a:latin typeface="Amiri" pitchFamily="2" charset="-78"/>
+                <a:ea typeface="Amiri" pitchFamily="2" charset="-78"/>
                 <a:cs typeface="Amiri" pitchFamily="2" charset="-78"/>
               </a:rPr>
               <a:t>القُمَاشِ</a:t>
@@ -21734,6 +21858,7 @@
                   <a:srgbClr val="1B3B6F"/>
                 </a:solidFill>
                 <a:latin typeface="Amiri" pitchFamily="2" charset="-78"/>
+                <a:ea typeface="Amiri" pitchFamily="2" charset="-78"/>
                 <a:cs typeface="Amiri" pitchFamily="2" charset="-78"/>
               </a:rPr>
               <a:t>مَصْنُوعٌ مِنْ …</a:t>
@@ -21875,6 +22000,7 @@
                   <a:srgbClr val="1B3B6F"/>
                 </a:solidFill>
                 <a:latin typeface="Amiri" pitchFamily="2" charset="-78"/>
+                <a:ea typeface="Amiri" pitchFamily="2" charset="-78"/>
                 <a:cs typeface="Amiri" pitchFamily="2" charset="-78"/>
               </a:rPr>
               <a:t>فِي الحَافِلَةِ، صَبَاحَ الإِثْنَيْنِ</a:t>
@@ -21913,6 +22039,7 @@
                   <a:srgbClr val="1B3B6F"/>
                 </a:solidFill>
                 <a:latin typeface="Amiri" pitchFamily="2" charset="-78"/>
+                <a:ea typeface="Amiri" pitchFamily="2" charset="-78"/>
                 <a:cs typeface="Amiri" pitchFamily="2" charset="-78"/>
               </a:rPr>
               <a:t>أَيْنَ وَمَتَى فَقَدْتَهُ؟</a:t>
@@ -22054,6 +22181,7 @@
                   <a:srgbClr val="1B3B6F"/>
                 </a:solidFill>
                 <a:latin typeface="Amiri" pitchFamily="2" charset="-78"/>
+                <a:ea typeface="Amiri" pitchFamily="2" charset="-78"/>
                 <a:cs typeface="Amiri" pitchFamily="2" charset="-78"/>
               </a:rPr>
               <a:t>عَلَيْهَا نُجُومٌ صَفْرَاءُ صَغِيرَةٌ</a:t>
@@ -22092,6 +22220,7 @@
                   <a:srgbClr val="1B3B6F"/>
                 </a:solidFill>
                 <a:latin typeface="Amiri" pitchFamily="2" charset="-78"/>
+                <a:ea typeface="Amiri" pitchFamily="2" charset="-78"/>
                 <a:cs typeface="Amiri" pitchFamily="2" charset="-78"/>
               </a:rPr>
               <a:t>عَلَامَةٌ مُمَيِّزَةٌ</a:t>
@@ -22233,6 +22362,7 @@
                   <a:srgbClr val="1B3B6F"/>
                 </a:solidFill>
                 <a:latin typeface="Amiri" pitchFamily="2" charset="-78"/>
+                <a:ea typeface="Amiri" pitchFamily="2" charset="-78"/>
                 <a:cs typeface="Amiri" pitchFamily="2" charset="-78"/>
               </a:rPr>
               <a:t>كَانَ فِيهَا دَفْتَرٌ أَحْمَرُ وَمِقْلَمَةٌ خَضْرَاءُ وَهَاتِفِي.</a:t>
@@ -22271,6 +22401,7 @@
                   <a:srgbClr val="1B3B6F"/>
                 </a:solidFill>
                 <a:latin typeface="Amiri" pitchFamily="2" charset="-78"/>
+                <a:ea typeface="Amiri" pitchFamily="2" charset="-78"/>
                 <a:cs typeface="Amiri" pitchFamily="2" charset="-78"/>
               </a:rPr>
               <a:t>جُمْلَةٌ: مَاذَا كَانَ فِيهَا؟</a:t>
@@ -22480,6 +22611,7 @@
                   <a:srgbClr val="D4AF37"/>
                 </a:solidFill>
                 <a:latin typeface="Amiri" pitchFamily="2" charset="-78"/>
+                <a:ea typeface="Amiri" pitchFamily="2" charset="-78"/>
                 <a:cs typeface="Amiri" pitchFamily="2" charset="-78"/>
               </a:rPr>
               <a:t>م</a:t>
@@ -22800,6 +22932,7 @@
                   <a:srgbClr val="8A6D1E"/>
                 </a:solidFill>
                 <a:latin typeface="Amiri" pitchFamily="2" charset="-78"/>
+                <a:ea typeface="Amiri" pitchFamily="2" charset="-78"/>
                 <a:cs typeface="Amiri" pitchFamily="2" charset="-78"/>
               </a:rPr>
               <a:t>رِسَالَةٌ عَنْ هَدَايَايَ</a:t>
@@ -23275,6 +23408,7 @@
                   <a:srgbClr val="1B3B6F"/>
                 </a:solidFill>
                 <a:latin typeface="Amiri" pitchFamily="2" charset="-78"/>
+                <a:ea typeface="Amiri" pitchFamily="2" charset="-78"/>
                 <a:cs typeface="Amiri" pitchFamily="2" charset="-78"/>
               </a:rPr>
               <a:t>أَعْطَتْنِي أُمِّي …</a:t>
@@ -23351,6 +23485,7 @@
                   <a:srgbClr val="1B3B6F"/>
                 </a:solidFill>
                 <a:latin typeface="Amiri" pitchFamily="2" charset="-78"/>
+                <a:ea typeface="Amiri" pitchFamily="2" charset="-78"/>
                 <a:cs typeface="Amiri" pitchFamily="2" charset="-78"/>
               </a:rPr>
               <a:t>… مَصْنُوعٌ مِنَ …</a:t>
@@ -23427,6 +23562,7 @@
                   <a:srgbClr val="1B3B6F"/>
                 </a:solidFill>
                 <a:latin typeface="Amiri" pitchFamily="2" charset="-78"/>
+                <a:ea typeface="Amiri" pitchFamily="2" charset="-78"/>
                 <a:cs typeface="Amiri" pitchFamily="2" charset="-78"/>
               </a:rPr>
               <a:t>أُحِبُّ … لِأَنَّ لَوْنَهُ …</a:t>
@@ -23503,6 +23639,7 @@
                   <a:srgbClr val="1B3B6F"/>
                 </a:solidFill>
                 <a:latin typeface="Amiri" pitchFamily="2" charset="-78"/>
+                <a:ea typeface="Amiri" pitchFamily="2" charset="-78"/>
                 <a:cs typeface="Amiri" pitchFamily="2" charset="-78"/>
               </a:rPr>
               <a:t>سَأَلْبَسُهُ فِي …</a:t>
@@ -23674,6 +23811,7 @@
                   <a:srgbClr val="D4AF37"/>
                 </a:solidFill>
                 <a:latin typeface="Amiri" pitchFamily="2" charset="-78"/>
+                <a:ea typeface="Amiri" pitchFamily="2" charset="-78"/>
                 <a:cs typeface="Amiri" pitchFamily="2" charset="-78"/>
               </a:rPr>
               <a:t>م</a:t>
@@ -23994,6 +24132,7 @@
                   <a:srgbClr val="8A6D1E"/>
                 </a:solidFill>
                 <a:latin typeface="Amiri" pitchFamily="2" charset="-78"/>
+                <a:ea typeface="Amiri" pitchFamily="2" charset="-78"/>
                 <a:cs typeface="Amiri" pitchFamily="2" charset="-78"/>
               </a:rPr>
               <a:t>نَصُّ السُّؤَالِ</a:t>
@@ -24274,6 +24413,7 @@
                   <a:srgbClr val="1B3B6F"/>
                 </a:solidFill>
                 <a:latin typeface="Amiri" pitchFamily="2" charset="-78"/>
+                <a:ea typeface="Amiri" pitchFamily="2" charset="-78"/>
                 <a:cs typeface="Amiri" pitchFamily="2" charset="-78"/>
               </a:rPr>
               <a:t>كَانَ أَمْسِ عِيدُ مِيلَادِكِ. اكْتُبِي رِسَالَةً إِلَى صَدِيقَتِكِ (٨٠–٩٠ كَلِمَةً).</a:t>
@@ -24415,6 +24555,7 @@
                   <a:srgbClr val="1B3B6F"/>
                 </a:solidFill>
                 <a:latin typeface="Amiri" pitchFamily="2" charset="-78"/>
+                <a:ea typeface="Amiri" pitchFamily="2" charset="-78"/>
                 <a:cs typeface="Amiri" pitchFamily="2" charset="-78"/>
               </a:rPr>
               <a:t>كَيْفَ احْتَفَلْتِ؟</a:t>
@@ -24556,6 +24697,7 @@
                   <a:srgbClr val="1B3B6F"/>
                 </a:solidFill>
                 <a:latin typeface="Amiri" pitchFamily="2" charset="-78"/>
+                <a:ea typeface="Amiri" pitchFamily="2" charset="-78"/>
                 <a:cs typeface="Amiri" pitchFamily="2" charset="-78"/>
               </a:rPr>
               <a:t>صِفِي الهَدَايَا بِدِقَّةٍ (اللَّوْنُ، المَادَّةُ).</a:t>
@@ -24697,6 +24839,7 @@
                   <a:srgbClr val="1B3B6F"/>
                 </a:solidFill>
                 <a:latin typeface="Amiri" pitchFamily="2" charset="-78"/>
+                <a:ea typeface="Amiri" pitchFamily="2" charset="-78"/>
                 <a:cs typeface="Amiri" pitchFamily="2" charset="-78"/>
               </a:rPr>
               <a:t>مَا هَدِيَّتُكِ المُفَضَّلَةُ؟ وَلِمَاذَا؟</a:t>
@@ -24838,6 +24981,7 @@
                   <a:srgbClr val="1B3B6F"/>
                 </a:solidFill>
                 <a:latin typeface="Amiri" pitchFamily="2" charset="-78"/>
+                <a:ea typeface="Amiri" pitchFamily="2" charset="-78"/>
                 <a:cs typeface="Amiri" pitchFamily="2" charset="-78"/>
               </a:rPr>
               <a:t>مَتَى سَتَسْتَعْمِلِينَهَا أَوْ تَلْبَسِينَهَا؟</a:t>
@@ -25047,6 +25191,7 @@
                   <a:srgbClr val="D4AF37"/>
                 </a:solidFill>
                 <a:latin typeface="Amiri" pitchFamily="2" charset="-78"/>
+                <a:ea typeface="Amiri" pitchFamily="2" charset="-78"/>
                 <a:cs typeface="Amiri" pitchFamily="2" charset="-78"/>
               </a:rPr>
               <a:t>م</a:t>
@@ -25367,6 +25512,7 @@
                   <a:srgbClr val="8A6D1E"/>
                 </a:solidFill>
                 <a:latin typeface="Amiri" pitchFamily="2" charset="-78"/>
+                <a:ea typeface="Amiri" pitchFamily="2" charset="-78"/>
                 <a:cs typeface="Amiri" pitchFamily="2" charset="-78"/>
               </a:rPr>
               <a:t>قَوَالِبُ الكِتَابَةِ</a:t>
@@ -25647,6 +25793,7 @@
                   <a:srgbClr val="1B3B6F"/>
                 </a:solidFill>
                 <a:latin typeface="Amiri" pitchFamily="2" charset="-78"/>
+                <a:ea typeface="Amiri" pitchFamily="2" charset="-78"/>
                 <a:cs typeface="Amiri" pitchFamily="2" charset="-78"/>
               </a:rPr>
               <a:t>مَرْحَبًا يَا ______ ، كَيْفَ حَالُكِ؟</a:t>
@@ -25853,6 +26000,7 @@
                   <a:srgbClr val="1B3B6F"/>
                 </a:solidFill>
                 <a:latin typeface="Amiri" pitchFamily="2" charset="-78"/>
+                <a:ea typeface="Amiri" pitchFamily="2" charset="-78"/>
                 <a:cs typeface="Amiri" pitchFamily="2" charset="-78"/>
               </a:rPr>
               <a:t>أَمْسِ كَانَ عِيدُ مِيلَادِي، وَ ______ .</a:t>
@@ -26059,6 +26207,7 @@
                   <a:srgbClr val="1B3B6F"/>
                 </a:solidFill>
                 <a:latin typeface="Amiri" pitchFamily="2" charset="-78"/>
+                <a:ea typeface="Amiri" pitchFamily="2" charset="-78"/>
                 <a:cs typeface="Amiri" pitchFamily="2" charset="-78"/>
               </a:rPr>
               <a:t>أَعْطَتْنِي أُمِّي ______ ______ ، مَصْنُوعًا مِنَ ______ .</a:t>
@@ -26265,6 +26414,7 @@
                   <a:srgbClr val="1B3B6F"/>
                 </a:solidFill>
                 <a:latin typeface="Amiri" pitchFamily="2" charset="-78"/>
+                <a:ea typeface="Amiri" pitchFamily="2" charset="-78"/>
                 <a:cs typeface="Amiri" pitchFamily="2" charset="-78"/>
               </a:rPr>
               <a:t>أُحِبُّ ______ كَثِيرًا، لِأَنَّ ______ .</a:t>
@@ -26471,6 +26621,7 @@
                   <a:srgbClr val="1B3B6F"/>
                 </a:solidFill>
                 <a:latin typeface="Amiri" pitchFamily="2" charset="-78"/>
+                <a:ea typeface="Amiri" pitchFamily="2" charset="-78"/>
                 <a:cs typeface="Amiri" pitchFamily="2" charset="-78"/>
               </a:rPr>
               <a:t>سَأَلْبَسُهُ / سَأَسْتَعْمِلُهَا فِي ______ .</a:t>
@@ -26677,6 +26828,7 @@
                   <a:srgbClr val="1B3B6F"/>
                 </a:solidFill>
                 <a:latin typeface="Amiri" pitchFamily="2" charset="-78"/>
+                <a:ea typeface="Amiri" pitchFamily="2" charset="-78"/>
                 <a:cs typeface="Amiri" pitchFamily="2" charset="-78"/>
               </a:rPr>
               <a:t>مَعَ السَّلَامَةِ، ______</a:t>
@@ -26916,13 +27068,9 @@
     <a:fontScheme name="Office">
       <a:majorFont>
         <a:latin typeface="Calibri Light" panose="020F0302020204030204"/>
-        <a:ea typeface=""/>
-        <a:cs typeface=""/>
-        <a:font script="Jpan" typeface="游ゴシック Light"/>
-        <a:font script="Hang" typeface="맑은 고딕"/>
-        <a:font script="Hans" typeface="等线 Light"/>
-        <a:font script="Hant" typeface="新細明體"/>
-        <a:font script="Arab" typeface="Times New Roman"/>
+        <a:ea typeface="Amiri" pitchFamily="2" charset="-78"/>
+        <a:cs typeface="Amiri" pitchFamily="2" charset="-78"/>
+        <a:font script="Arab" typeface="Amiri"/>
         <a:font script="Hebr" typeface="Times New Roman"/>
         <a:font script="Thai" typeface="Angsana New"/>
         <a:font script="Ethi" typeface="Nyala"/>
@@ -26968,13 +27116,9 @@
       </a:majorFont>
       <a:minorFont>
         <a:latin typeface="Calibri" panose="020F0502020204030204"/>
-        <a:ea typeface=""/>
-        <a:cs typeface=""/>
-        <a:font script="Jpan" typeface="游ゴシック"/>
-        <a:font script="Hang" typeface="맑은 고딕"/>
-        <a:font script="Hans" typeface="等线"/>
-        <a:font script="Hant" typeface="新細明體"/>
-        <a:font script="Arab" typeface="Arial"/>
+        <a:ea typeface="Amiri" pitchFamily="2" charset="-78"/>
+        <a:cs typeface="Amiri" pitchFamily="2" charset="-78"/>
+        <a:font script="Arab" typeface="Amiri"/>
         <a:font script="Hebr" typeface="Arial"/>
         <a:font script="Thai" typeface="Cordia New"/>
         <a:font script="Ethi" typeface="Nyala"/>

--- a/Topic_B/Exam_Practice/TB-L06_Writing_Workshop_Colours_and_Accurate_Description.pptx
+++ b/Topic_B/Exam_Practice/TB-L06_Writing_Workshop_Colours_and_Accurate_Description.pptx
@@ -3848,7 +3848,7 @@
                 <a:solidFill>
                   <a:srgbClr val="FFFFFF"/>
                 </a:solidFill>
-                <a:latin typeface="Calibri" pitchFamily="34" charset="0"/>
+                <a:latin typeface="Amiri" pitchFamily="2" charset="-78"/>
                 <a:ea typeface="Amiri" pitchFamily="2" charset="-78"/>
                 <a:cs typeface="Amiri" pitchFamily="2" charset="-78"/>
               </a:rPr>
@@ -3914,7 +3914,7 @@
                 <a:solidFill>
                   <a:srgbClr val="FFFFFF"/>
                 </a:solidFill>
-                <a:latin typeface="Calibri" pitchFamily="34" charset="0"/>
+                <a:latin typeface="Amiri" pitchFamily="2" charset="-78"/>
                 <a:ea typeface="Amiri" pitchFamily="2" charset="-78"/>
                 <a:cs typeface="Amiri" pitchFamily="2" charset="-78"/>
               </a:rPr>
@@ -3980,7 +3980,7 @@
                 <a:solidFill>
                   <a:srgbClr val="FFFFFF"/>
                 </a:solidFill>
-                <a:latin typeface="Calibri" pitchFamily="34" charset="0"/>
+                <a:latin typeface="Amiri" pitchFamily="2" charset="-78"/>
                 <a:ea typeface="Amiri" pitchFamily="2" charset="-78"/>
                 <a:cs typeface="Amiri" pitchFamily="2" charset="-78"/>
               </a:rPr>
@@ -4046,7 +4046,7 @@
                 <a:solidFill>
                   <a:srgbClr val="FFFFFF"/>
                 </a:solidFill>
-                <a:latin typeface="Calibri" pitchFamily="34" charset="0"/>
+                <a:latin typeface="Amiri" pitchFamily="2" charset="-78"/>
                 <a:ea typeface="Amiri" pitchFamily="2" charset="-78"/>
                 <a:cs typeface="Amiri" pitchFamily="2" charset="-78"/>
               </a:rPr>
@@ -4844,7 +4844,7 @@
                 <a:solidFill>
                   <a:srgbClr val="FFFFFF"/>
                 </a:solidFill>
-                <a:latin typeface="Calibri" pitchFamily="34" charset="0"/>
+                <a:latin typeface="Amiri" pitchFamily="2" charset="-78"/>
                 <a:ea typeface="Amiri" pitchFamily="2" charset="-78"/>
                 <a:cs typeface="Amiri" pitchFamily="2" charset="-78"/>
               </a:rPr>
@@ -4910,7 +4910,7 @@
                 <a:solidFill>
                   <a:srgbClr val="FFFFFF"/>
                 </a:solidFill>
-                <a:latin typeface="Calibri" pitchFamily="34" charset="0"/>
+                <a:latin typeface="Amiri" pitchFamily="2" charset="-78"/>
                 <a:ea typeface="Amiri" pitchFamily="2" charset="-78"/>
                 <a:cs typeface="Amiri" pitchFamily="2" charset="-78"/>
               </a:rPr>
@@ -4976,7 +4976,7 @@
                 <a:solidFill>
                   <a:srgbClr val="FFFFFF"/>
                 </a:solidFill>
-                <a:latin typeface="Calibri" pitchFamily="34" charset="0"/>
+                <a:latin typeface="Amiri" pitchFamily="2" charset="-78"/>
                 <a:ea typeface="Amiri" pitchFamily="2" charset="-78"/>
                 <a:cs typeface="Amiri" pitchFamily="2" charset="-78"/>
               </a:rPr>
@@ -5042,7 +5042,7 @@
                 <a:solidFill>
                   <a:srgbClr val="FFFFFF"/>
                 </a:solidFill>
-                <a:latin typeface="Calibri" pitchFamily="34" charset="0"/>
+                <a:latin typeface="Amiri" pitchFamily="2" charset="-78"/>
                 <a:ea typeface="Amiri" pitchFamily="2" charset="-78"/>
                 <a:cs typeface="Amiri" pitchFamily="2" charset="-78"/>
               </a:rPr>
@@ -8602,7 +8602,7 @@
                 <a:solidFill>
                   <a:srgbClr val="FFFFFF"/>
                 </a:solidFill>
-                <a:latin typeface="Calibri" pitchFamily="34" charset="0"/>
+                <a:latin typeface="Amiri" pitchFamily="2" charset="-78"/>
                 <a:ea typeface="Amiri" pitchFamily="2" charset="-78"/>
                 <a:cs typeface="Amiri" pitchFamily="2" charset="-78"/>
               </a:rPr>
@@ -8668,7 +8668,7 @@
                 <a:solidFill>
                   <a:srgbClr val="FFFFFF"/>
                 </a:solidFill>
-                <a:latin typeface="Calibri" pitchFamily="34" charset="0"/>
+                <a:latin typeface="Amiri" pitchFamily="2" charset="-78"/>
                 <a:ea typeface="Amiri" pitchFamily="2" charset="-78"/>
                 <a:cs typeface="Amiri" pitchFamily="2" charset="-78"/>
               </a:rPr>
@@ -8734,7 +8734,7 @@
                 <a:solidFill>
                   <a:srgbClr val="FFFFFF"/>
                 </a:solidFill>
-                <a:latin typeface="Calibri" pitchFamily="34" charset="0"/>
+                <a:latin typeface="Amiri" pitchFamily="2" charset="-78"/>
                 <a:ea typeface="Amiri" pitchFamily="2" charset="-78"/>
                 <a:cs typeface="Amiri" pitchFamily="2" charset="-78"/>
               </a:rPr>
@@ -8800,7 +8800,7 @@
                 <a:solidFill>
                   <a:srgbClr val="FFFFFF"/>
                 </a:solidFill>
-                <a:latin typeface="Calibri" pitchFamily="34" charset="0"/>
+                <a:latin typeface="Amiri" pitchFamily="2" charset="-78"/>
                 <a:ea typeface="Amiri" pitchFamily="2" charset="-78"/>
                 <a:cs typeface="Amiri" pitchFamily="2" charset="-78"/>
               </a:rPr>
@@ -9587,7 +9587,7 @@
                 <a:solidFill>
                   <a:srgbClr val="FFFFFF"/>
                 </a:solidFill>
-                <a:latin typeface="Calibri" pitchFamily="34" charset="0"/>
+                <a:latin typeface="Amiri" pitchFamily="2" charset="-78"/>
                 <a:ea typeface="Amiri" pitchFamily="2" charset="-78"/>
                 <a:cs typeface="Amiri" pitchFamily="2" charset="-78"/>
               </a:rPr>
@@ -9653,7 +9653,7 @@
                 <a:solidFill>
                   <a:srgbClr val="FFFFFF"/>
                 </a:solidFill>
-                <a:latin typeface="Calibri" pitchFamily="34" charset="0"/>
+                <a:latin typeface="Amiri" pitchFamily="2" charset="-78"/>
                 <a:ea typeface="Amiri" pitchFamily="2" charset="-78"/>
                 <a:cs typeface="Amiri" pitchFamily="2" charset="-78"/>
               </a:rPr>
@@ -9719,7 +9719,7 @@
                 <a:solidFill>
                   <a:srgbClr val="FFFFFF"/>
                 </a:solidFill>
-                <a:latin typeface="Calibri" pitchFamily="34" charset="0"/>
+                <a:latin typeface="Amiri" pitchFamily="2" charset="-78"/>
                 <a:ea typeface="Amiri" pitchFamily="2" charset="-78"/>
                 <a:cs typeface="Amiri" pitchFamily="2" charset="-78"/>
               </a:rPr>
@@ -9785,7 +9785,7 @@
                 <a:solidFill>
                   <a:srgbClr val="FFFFFF"/>
                 </a:solidFill>
-                <a:latin typeface="Calibri" pitchFamily="34" charset="0"/>
+                <a:latin typeface="Amiri" pitchFamily="2" charset="-78"/>
                 <a:ea typeface="Amiri" pitchFamily="2" charset="-78"/>
                 <a:cs typeface="Amiri" pitchFamily="2" charset="-78"/>
               </a:rPr>
@@ -10572,7 +10572,7 @@
                 <a:solidFill>
                   <a:srgbClr val="FFFFFF"/>
                 </a:solidFill>
-                <a:latin typeface="Calibri" pitchFamily="34" charset="0"/>
+                <a:latin typeface="Amiri" pitchFamily="2" charset="-78"/>
                 <a:ea typeface="Amiri" pitchFamily="2" charset="-78"/>
                 <a:cs typeface="Amiri" pitchFamily="2" charset="-78"/>
               </a:rPr>
@@ -10638,7 +10638,7 @@
                 <a:solidFill>
                   <a:srgbClr val="FFFFFF"/>
                 </a:solidFill>
-                <a:latin typeface="Calibri" pitchFamily="34" charset="0"/>
+                <a:latin typeface="Amiri" pitchFamily="2" charset="-78"/>
                 <a:ea typeface="Amiri" pitchFamily="2" charset="-78"/>
                 <a:cs typeface="Amiri" pitchFamily="2" charset="-78"/>
               </a:rPr>
@@ -10704,7 +10704,7 @@
                 <a:solidFill>
                   <a:srgbClr val="FFFFFF"/>
                 </a:solidFill>
-                <a:latin typeface="Calibri" pitchFamily="34" charset="0"/>
+                <a:latin typeface="Amiri" pitchFamily="2" charset="-78"/>
                 <a:ea typeface="Amiri" pitchFamily="2" charset="-78"/>
                 <a:cs typeface="Amiri" pitchFamily="2" charset="-78"/>
               </a:rPr>
@@ -10770,7 +10770,7 @@
                 <a:solidFill>
                   <a:srgbClr val="FFFFFF"/>
                 </a:solidFill>
-                <a:latin typeface="Calibri" pitchFamily="34" charset="0"/>
+                <a:latin typeface="Amiri" pitchFamily="2" charset="-78"/>
                 <a:ea typeface="Amiri" pitchFamily="2" charset="-78"/>
                 <a:cs typeface="Amiri" pitchFamily="2" charset="-78"/>
               </a:rPr>
